--- a/public/fun/pack/pptx/family/가족소개_04_나혼자·1인가구_제주유채밭.pptx
+++ b/public/fun/pack/pptx/family/가족소개_04_나혼자·1인가구_제주유채밭.pptx
@@ -3347,7 +3347,7 @@
             <a:r>
               <a:rPr sz="3600" b="1" i="0">
                 <a:solidFill>
-                  <a:srgbClr val="605610"/>
+                  <a:srgbClr val="72671D"/>
                 </a:solidFill>
               </a:rPr>
               <a:t>우리 가족을 소개합니다</a:t>
@@ -3385,7 +3385,7 @@
             <a:r>
               <a:rPr sz="1700" b="0" i="1">
                 <a:solidFill>
-                  <a:srgbClr val="605610"/>
+                  <a:srgbClr val="72671D"/>
                 </a:solidFill>
               </a:rPr>
               <a:t>혼자 떠난 제주, 유채밭에서</a:t>
@@ -3472,7 +3472,7 @@
             <a:avLst/>
           </a:prstGeom>
           <a:solidFill>
-            <a:srgbClr val="B8A41E"/>
+            <a:srgbClr val="DFC93A"/>
           </a:solidFill>
           <a:ln>
             <a:noFill/>
@@ -3539,11 +3539,11 @@
             <a:avLst/>
           </a:prstGeom>
           <a:solidFill>
-            <a:srgbClr val="F8F2C9"/>
+            <a:srgbClr val="F7F3D4"/>
           </a:solidFill>
           <a:ln w="19050">
             <a:solidFill>
-              <a:srgbClr val="B8A41E"/>
+              <a:srgbClr val="DFC93A"/>
             </a:solidFill>
             <a:prstDash val="dash"/>
           </a:ln>
@@ -3562,7 +3562,7 @@
             <a:r>
               <a:rPr sz="1200" b="0" i="0">
                 <a:solidFill>
-                  <a:srgbClr val="605610"/>
+                  <a:srgbClr val="72671D"/>
                 </a:solidFill>
               </a:rPr>
               <a:t>사진</a:t>
@@ -3600,7 +3600,7 @@
             <a:r>
               <a:rPr sz="1600" b="1" i="0">
                 <a:solidFill>
-                  <a:srgbClr val="605610"/>
+                  <a:srgbClr val="72671D"/>
                 </a:solidFill>
               </a:rPr>
               <a:t>나</a:t>
@@ -3691,11 +3691,11 @@
             <a:avLst/>
           </a:prstGeom>
           <a:solidFill>
-            <a:srgbClr val="F8F2C9"/>
+            <a:srgbClr val="F7F3D4"/>
           </a:solidFill>
           <a:ln w="19050">
             <a:solidFill>
-              <a:srgbClr val="B8A41E"/>
+              <a:srgbClr val="DFC93A"/>
             </a:solidFill>
             <a:prstDash val="dash"/>
           </a:ln>
@@ -3714,7 +3714,7 @@
             <a:r>
               <a:rPr sz="1200" b="0" i="0">
                 <a:solidFill>
-                  <a:srgbClr val="605610"/>
+                  <a:srgbClr val="72671D"/>
                 </a:solidFill>
               </a:rPr>
               <a:t>사진</a:t>
@@ -3752,7 +3752,7 @@
             <a:r>
               <a:rPr sz="1600" b="1" i="0">
                 <a:solidFill>
-                  <a:srgbClr val="605610"/>
+                  <a:srgbClr val="72671D"/>
                 </a:solidFill>
               </a:rPr>
               <a:t>내 공간</a:t>
@@ -3843,11 +3843,11 @@
             <a:avLst/>
           </a:prstGeom>
           <a:solidFill>
-            <a:srgbClr val="F8F2C9"/>
+            <a:srgbClr val="F7F3D4"/>
           </a:solidFill>
           <a:ln w="19050">
             <a:solidFill>
-              <a:srgbClr val="B8A41E"/>
+              <a:srgbClr val="DFC93A"/>
             </a:solidFill>
             <a:prstDash val="dash"/>
           </a:ln>
@@ -3866,7 +3866,7 @@
             <a:r>
               <a:rPr sz="1200" b="0" i="0">
                 <a:solidFill>
-                  <a:srgbClr val="605610"/>
+                  <a:srgbClr val="72671D"/>
                 </a:solidFill>
               </a:rPr>
               <a:t>사진</a:t>
@@ -3904,7 +3904,7 @@
             <a:r>
               <a:rPr sz="1600" b="1" i="0">
                 <a:solidFill>
-                  <a:srgbClr val="605610"/>
+                  <a:srgbClr val="72671D"/>
                 </a:solidFill>
               </a:rPr>
               <a:t>내 하루</a:t>
@@ -4021,7 +4021,7 @@
             <a:avLst/>
           </a:prstGeom>
           <a:solidFill>
-            <a:srgbClr val="B8A41E"/>
+            <a:srgbClr val="DFC93A"/>
           </a:solidFill>
           <a:ln>
             <a:noFill/>
@@ -4088,7 +4088,7 @@
             <a:avLst/>
           </a:prstGeom>
           <a:solidFill>
-            <a:srgbClr val="F8F2C9"/>
+            <a:srgbClr val="F7F3D4"/>
           </a:solidFill>
           <a:ln>
             <a:noFill/>
@@ -4117,7 +4117,7 @@
             <a:avLst/>
           </a:prstGeom>
           <a:solidFill>
-            <a:srgbClr val="B8A41E"/>
+            <a:srgbClr val="DFC93A"/>
           </a:solidFill>
           <a:ln w="38100">
             <a:solidFill>
@@ -4163,7 +4163,7 @@
             <a:r>
               <a:rPr sz="1600" b="1" i="0">
                 <a:solidFill>
-                  <a:srgbClr val="B8A41E"/>
+                  <a:srgbClr val="DFC93A"/>
                 </a:solidFill>
               </a:rPr>
               <a:t>태어난 곳</a:t>
@@ -4201,7 +4201,7 @@
             <a:r>
               <a:rPr sz="1800" b="1" i="0">
                 <a:solidFill>
-                  <a:srgbClr val="605610"/>
+                  <a:srgbClr val="72671D"/>
                 </a:solidFill>
               </a:rPr>
               <a:t>나의 뿌리</a:t>
@@ -4262,7 +4262,7 @@
             <a:avLst/>
           </a:prstGeom>
           <a:solidFill>
-            <a:srgbClr val="B8A41E"/>
+            <a:srgbClr val="DFC93A"/>
           </a:solidFill>
           <a:ln w="38100">
             <a:solidFill>
@@ -4308,7 +4308,7 @@
             <a:r>
               <a:rPr sz="1600" b="1" i="0">
                 <a:solidFill>
-                  <a:srgbClr val="B8A41E"/>
+                  <a:srgbClr val="DFC93A"/>
                 </a:solidFill>
               </a:rPr>
               <a:t>학창 시절</a:t>
@@ -4346,7 +4346,7 @@
             <a:r>
               <a:rPr sz="1800" b="1" i="0">
                 <a:solidFill>
-                  <a:srgbClr val="605610"/>
+                  <a:srgbClr val="72671D"/>
                 </a:solidFill>
               </a:rPr>
               <a:t>자라던 시간</a:t>
@@ -4407,7 +4407,7 @@
             <a:avLst/>
           </a:prstGeom>
           <a:solidFill>
-            <a:srgbClr val="B8A41E"/>
+            <a:srgbClr val="DFC93A"/>
           </a:solidFill>
           <a:ln w="38100">
             <a:solidFill>
@@ -4453,7 +4453,7 @@
             <a:r>
               <a:rPr sz="1600" b="1" i="0">
                 <a:solidFill>
-                  <a:srgbClr val="B8A41E"/>
+                  <a:srgbClr val="DFC93A"/>
                 </a:solidFill>
               </a:rPr>
               <a:t>혼자 시작한 날</a:t>
@@ -4491,7 +4491,7 @@
             <a:r>
               <a:rPr sz="1800" b="1" i="0">
                 <a:solidFill>
-                  <a:srgbClr val="605610"/>
+                  <a:srgbClr val="72671D"/>
                 </a:solidFill>
               </a:rPr>
               <a:t>나의 첫 집</a:t>
@@ -4552,7 +4552,7 @@
             <a:avLst/>
           </a:prstGeom>
           <a:solidFill>
-            <a:srgbClr val="B8A41E"/>
+            <a:srgbClr val="DFC93A"/>
           </a:solidFill>
           <a:ln w="38100">
             <a:solidFill>
@@ -4598,7 +4598,7 @@
             <a:r>
               <a:rPr sz="1600" b="1" i="0">
                 <a:solidFill>
-                  <a:srgbClr val="B8A41E"/>
+                  <a:srgbClr val="DFC93A"/>
                 </a:solidFill>
               </a:rPr>
               <a:t>지금</a:t>
@@ -4636,7 +4636,7 @@
             <a:r>
               <a:rPr sz="1800" b="1" i="0">
                 <a:solidFill>
-                  <a:srgbClr val="605610"/>
+                  <a:srgbClr val="72671D"/>
                 </a:solidFill>
               </a:rPr>
               <a:t>오늘의 나</a:t>
@@ -4723,7 +4723,7 @@
             <a:avLst/>
           </a:prstGeom>
           <a:solidFill>
-            <a:srgbClr val="B8A41E"/>
+            <a:srgbClr val="DFC93A"/>
           </a:solidFill>
           <a:ln>
             <a:noFill/>
@@ -4792,11 +4792,11 @@
             </a:avLst>
           </a:prstGeom>
           <a:solidFill>
-            <a:srgbClr val="FCFAED"/>
+            <a:srgbClr val="FCFBF3"/>
           </a:solidFill>
           <a:ln w="12700">
             <a:solidFill>
-              <a:srgbClr val="F8F2C9"/>
+              <a:srgbClr val="F7F3D4"/>
             </a:solidFill>
           </a:ln>
         </p:spPr>
@@ -4823,7 +4823,7 @@
             <a:avLst/>
           </a:prstGeom>
           <a:solidFill>
-            <a:srgbClr val="B8A41E"/>
+            <a:srgbClr val="DFC93A"/>
           </a:solidFill>
           <a:ln>
             <a:noFill/>
@@ -4881,7 +4881,7 @@
             <a:r>
               <a:rPr sz="1800" b="1" i="0">
                 <a:solidFill>
-                  <a:srgbClr val="605610"/>
+                  <a:srgbClr val="72671D"/>
                 </a:solidFill>
               </a:rPr>
               <a:t>약속 1</a:t>
@@ -4944,11 +4944,11 @@
             </a:avLst>
           </a:prstGeom>
           <a:solidFill>
-            <a:srgbClr val="FCFAED"/>
+            <a:srgbClr val="FCFBF3"/>
           </a:solidFill>
           <a:ln w="12700">
             <a:solidFill>
-              <a:srgbClr val="F8F2C9"/>
+              <a:srgbClr val="F7F3D4"/>
             </a:solidFill>
           </a:ln>
         </p:spPr>
@@ -4975,7 +4975,7 @@
             <a:avLst/>
           </a:prstGeom>
           <a:solidFill>
-            <a:srgbClr val="B8A41E"/>
+            <a:srgbClr val="DFC93A"/>
           </a:solidFill>
           <a:ln>
             <a:noFill/>
@@ -5033,7 +5033,7 @@
             <a:r>
               <a:rPr sz="1800" b="1" i="0">
                 <a:solidFill>
-                  <a:srgbClr val="605610"/>
+                  <a:srgbClr val="72671D"/>
                 </a:solidFill>
               </a:rPr>
               <a:t>약속 2</a:t>
@@ -5096,11 +5096,11 @@
             </a:avLst>
           </a:prstGeom>
           <a:solidFill>
-            <a:srgbClr val="FCFAED"/>
+            <a:srgbClr val="FCFBF3"/>
           </a:solidFill>
           <a:ln w="12700">
             <a:solidFill>
-              <a:srgbClr val="F8F2C9"/>
+              <a:srgbClr val="F7F3D4"/>
             </a:solidFill>
           </a:ln>
         </p:spPr>
@@ -5127,7 +5127,7 @@
             <a:avLst/>
           </a:prstGeom>
           <a:solidFill>
-            <a:srgbClr val="B8A41E"/>
+            <a:srgbClr val="DFC93A"/>
           </a:solidFill>
           <a:ln>
             <a:noFill/>
@@ -5185,7 +5185,7 @@
             <a:r>
               <a:rPr sz="1800" b="1" i="0">
                 <a:solidFill>
-                  <a:srgbClr val="605610"/>
+                  <a:srgbClr val="72671D"/>
                 </a:solidFill>
               </a:rPr>
               <a:t>약속 3</a:t>
@@ -5272,7 +5272,7 @@
             <a:avLst/>
           </a:prstGeom>
           <a:solidFill>
-            <a:srgbClr val="B8A41E"/>
+            <a:srgbClr val="DFC93A"/>
           </a:solidFill>
           <a:ln>
             <a:noFill/>
@@ -5341,11 +5341,11 @@
             </a:avLst>
           </a:prstGeom>
           <a:solidFill>
-            <a:srgbClr val="F8F2C9"/>
+            <a:srgbClr val="F7F3D4"/>
           </a:solidFill>
           <a:ln w="19050">
             <a:solidFill>
-              <a:srgbClr val="B8A41E"/>
+              <a:srgbClr val="DFC93A"/>
             </a:solidFill>
             <a:prstDash val="dash"/>
           </a:ln>
@@ -5364,7 +5364,7 @@
             <a:r>
               <a:rPr sz="1200" b="0" i="0">
                 <a:solidFill>
-                  <a:srgbClr val="605610"/>
+                  <a:srgbClr val="72671D"/>
                 </a:solidFill>
               </a:rPr>
               <a:t>사진 1</a:t>
@@ -5389,11 +5389,11 @@
             </a:avLst>
           </a:prstGeom>
           <a:solidFill>
-            <a:srgbClr val="F8F2C9"/>
+            <a:srgbClr val="F7F3D4"/>
           </a:solidFill>
           <a:ln w="19050">
             <a:solidFill>
-              <a:srgbClr val="B8A41E"/>
+              <a:srgbClr val="DFC93A"/>
             </a:solidFill>
             <a:prstDash val="dash"/>
           </a:ln>
@@ -5412,7 +5412,7 @@
             <a:r>
               <a:rPr sz="1200" b="0" i="0">
                 <a:solidFill>
-                  <a:srgbClr val="605610"/>
+                  <a:srgbClr val="72671D"/>
                 </a:solidFill>
               </a:rPr>
               <a:t>사진 2</a:t>
@@ -5437,11 +5437,11 @@
             </a:avLst>
           </a:prstGeom>
           <a:solidFill>
-            <a:srgbClr val="F8F2C9"/>
+            <a:srgbClr val="F7F3D4"/>
           </a:solidFill>
           <a:ln w="19050">
             <a:solidFill>
-              <a:srgbClr val="B8A41E"/>
+              <a:srgbClr val="DFC93A"/>
             </a:solidFill>
             <a:prstDash val="dash"/>
           </a:ln>
@@ -5460,7 +5460,7 @@
             <a:r>
               <a:rPr sz="1200" b="0" i="0">
                 <a:solidFill>
-                  <a:srgbClr val="605610"/>
+                  <a:srgbClr val="72671D"/>
                 </a:solidFill>
               </a:rPr>
               <a:t>사진 3</a:t>
@@ -5485,11 +5485,11 @@
             </a:avLst>
           </a:prstGeom>
           <a:solidFill>
-            <a:srgbClr val="F8F2C9"/>
+            <a:srgbClr val="F7F3D4"/>
           </a:solidFill>
           <a:ln w="19050">
             <a:solidFill>
-              <a:srgbClr val="B8A41E"/>
+              <a:srgbClr val="DFC93A"/>
             </a:solidFill>
             <a:prstDash val="dash"/>
           </a:ln>
@@ -5508,7 +5508,7 @@
             <a:r>
               <a:rPr sz="1200" b="0" i="0">
                 <a:solidFill>
-                  <a:srgbClr val="605610"/>
+                  <a:srgbClr val="72671D"/>
                 </a:solidFill>
               </a:rPr>
               <a:t>사진 4</a:t>
@@ -5533,11 +5533,11 @@
             </a:avLst>
           </a:prstGeom>
           <a:solidFill>
-            <a:srgbClr val="F8F2C9"/>
+            <a:srgbClr val="F7F3D4"/>
           </a:solidFill>
           <a:ln w="19050">
             <a:solidFill>
-              <a:srgbClr val="B8A41E"/>
+              <a:srgbClr val="DFC93A"/>
             </a:solidFill>
             <a:prstDash val="dash"/>
           </a:ln>
@@ -5556,7 +5556,7 @@
             <a:r>
               <a:rPr sz="1200" b="0" i="0">
                 <a:solidFill>
-                  <a:srgbClr val="605610"/>
+                  <a:srgbClr val="72671D"/>
                 </a:solidFill>
               </a:rPr>
               <a:t>사진 5</a:t>
@@ -5581,11 +5581,11 @@
             </a:avLst>
           </a:prstGeom>
           <a:solidFill>
-            <a:srgbClr val="F8F2C9"/>
+            <a:srgbClr val="F7F3D4"/>
           </a:solidFill>
           <a:ln w="19050">
             <a:solidFill>
-              <a:srgbClr val="B8A41E"/>
+              <a:srgbClr val="DFC93A"/>
             </a:solidFill>
             <a:prstDash val="dash"/>
           </a:ln>
@@ -5604,7 +5604,7 @@
             <a:r>
               <a:rPr sz="1200" b="0" i="0">
                 <a:solidFill>
-                  <a:srgbClr val="605610"/>
+                  <a:srgbClr val="72671D"/>
                 </a:solidFill>
               </a:rPr>
               <a:t>사진 6</a:t>
@@ -5684,7 +5684,7 @@
             <a:r>
               <a:rPr sz="3600" b="1" i="0">
                 <a:solidFill>
-                  <a:srgbClr val="605610"/>
+                  <a:srgbClr val="72671D"/>
                 </a:solidFill>
               </a:rPr>
               <a:t>우리 가족 소개를 마칩니다</a:t>
@@ -5722,7 +5722,7 @@
             <a:r>
               <a:rPr sz="1700" b="0" i="1">
                 <a:solidFill>
-                  <a:srgbClr val="605610"/>
+                  <a:srgbClr val="72671D"/>
                 </a:solidFill>
               </a:rPr>
               <a:t>읽어 주셔서 고맙습니다</a:t>
@@ -5787,34 +5787,34 @@
         <a:sysClr val="window" lastClr="FFFFFF"/>
       </a:lt1>
       <a:dk2>
-        <a:srgbClr val="605610"/>
+        <a:srgbClr val="72671D"/>
       </a:dk2>
       <a:lt2>
-        <a:srgbClr val="FCFAED"/>
+        <a:srgbClr val="FCFBF3"/>
       </a:lt2>
       <a:accent1>
-        <a:srgbClr val="B8A41E"/>
+        <a:srgbClr val="DFC93A"/>
       </a:accent1>
       <a:accent2>
-        <a:srgbClr val="3B7191"/>
+        <a:srgbClr val="339941"/>
       </a:accent2>
       <a:accent3>
-        <a:srgbClr val="605610"/>
+        <a:srgbClr val="72671D"/>
       </a:accent3>
       <a:accent4>
-        <a:srgbClr val="F8F2C9"/>
+        <a:srgbClr val="F7F3D4"/>
       </a:accent4>
       <a:accent5>
-        <a:srgbClr val="7A8A58"/>
+        <a:srgbClr val="89B13E"/>
       </a:accent5>
       <a:accent6>
-        <a:srgbClr val="A09A70"/>
+        <a:srgbClr val="AAA477"/>
       </a:accent6>
       <a:hlink>
-        <a:srgbClr val="B8A41E"/>
+        <a:srgbClr val="DFC93A"/>
       </a:hlink>
       <a:folHlink>
-        <a:srgbClr val="605610"/>
+        <a:srgbClr val="72671D"/>
       </a:folHlink>
     </a:clrScheme>
     <a:fontScheme name="Office">
